--- a/public/plans/2026-05-04.pptx
+++ b/public/plans/2026-05-04.pptx
@@ -9098,7 +9098,7 @@
                 </a:solidFill>
                 <a:latin typeface="Calibri"/>
               </a:rPr>
-              <a:t>Ages 3–5  ·  45 minute session</a:t>
+              <a:t>Ages 3–5 · 45 minute session</a:t>
             </a:r>
           </a:p>
         </p:txBody>
@@ -9315,7 +9315,7 @@
                 </a:solidFill>
                 <a:latin typeface="Calibri"/>
               </a:rPr>
-              <a:t>COACH PLAYBOOK · PRE-K &amp; K</a:t>
+              <a:t>COACH PLAYBOOK · PRE-K &amp; KINDERGARTEN</a:t>
             </a:r>
           </a:p>
         </p:txBody>
@@ -11764,7 +11764,7 @@
                 </a:solidFill>
                 <a:latin typeface="Calibri"/>
               </a:rPr>
-              <a:t>qmtk Soccer · Coach Playbook · Pre-K &amp; K</a:t>
+              <a:t>qmtk Soccer · Coach Playbook · Pre-K &amp; Kindergarten</a:t>
             </a:r>
           </a:p>
         </p:txBody>
@@ -11981,7 +11981,7 @@
                 </a:solidFill>
                 <a:latin typeface="Calibri"/>
               </a:rPr>
-              <a:t>COACH PLAYBOOK · PRE-K &amp; K</a:t>
+              <a:t>COACH PLAYBOOK · PRE-K &amp; KINDERGARTEN</a:t>
             </a:r>
           </a:p>
         </p:txBody>
@@ -14642,7 +14642,7 @@
                 </a:solidFill>
                 <a:latin typeface="Calibri"/>
               </a:rPr>
-              <a:t>qmtk Soccer · Coach Playbook · Pre-K &amp; K</a:t>
+              <a:t>qmtk Soccer · Coach Playbook · Pre-K &amp; Kindergarten</a:t>
             </a:r>
           </a:p>
         </p:txBody>
@@ -14859,7 +14859,7 @@
                 </a:solidFill>
                 <a:latin typeface="Calibri"/>
               </a:rPr>
-              <a:t>COACH PLAYBOOK · PRE-K &amp; K</a:t>
+              <a:t>COACH PLAYBOOK · PRE-K &amp; KINDERGARTEN</a:t>
             </a:r>
           </a:p>
         </p:txBody>
@@ -17520,7 +17520,7 @@
                 </a:solidFill>
                 <a:latin typeface="Calibri"/>
               </a:rPr>
-              <a:t>qmtk Soccer · Coach Playbook · Pre-K &amp; K</a:t>
+              <a:t>qmtk Soccer · Coach Playbook · Pre-K &amp; Kindergarten</a:t>
             </a:r>
           </a:p>
         </p:txBody>
@@ -17737,7 +17737,7 @@
                 </a:solidFill>
                 <a:latin typeface="Calibri"/>
               </a:rPr>
-              <a:t>COACH PLAYBOOK · PRE-K &amp; K</a:t>
+              <a:t>COACH PLAYBOOK · PRE-K &amp; KINDERGARTEN</a:t>
             </a:r>
           </a:p>
         </p:txBody>
@@ -20132,7 +20132,7 @@
                 </a:solidFill>
                 <a:latin typeface="Calibri"/>
               </a:rPr>
-              <a:t>qmtk Soccer · Coach Playbook · Pre-K &amp; K</a:t>
+              <a:t>qmtk Soccer · Coach Playbook · Pre-K &amp; Kindergarten</a:t>
             </a:r>
           </a:p>
         </p:txBody>
@@ -20462,7 +20462,7 @@
                 </a:solidFill>
                 <a:latin typeface="Calibri"/>
               </a:rPr>
-              <a:t>Ages 6–11  ·  60 minute session</a:t>
+              <a:t>Ages 6–11 · 60 minute session</a:t>
             </a:r>
           </a:p>
         </p:txBody>
